--- a/docs/demo/final/kotak-pitch-deck.pptx
+++ b/docs/demo/final/kotak-pitch-deck.pptx
@@ -1127,7 +1127,7 @@
           <a:p>
             <a:r>
               <a:rPr lang="en-US" dirty="0"/>
-              <a:t>Under the hood: two halves, one rulebook. First, the engine, at build time. Bun pipelines turn the Economic Index, ONET and DOSM into dated monthly snapshots. Each skill's AI trend resolves Malaysia-first, down six ONET levels, before any global figure. Then followed by RunPod GPU batch, Qwen on vLLM, drafted skills for all 923 jobs in 13 minutes, and validators reject any task that isn't the job's own. Finally the product. One TypeScript rulebook runs in your browser and on our edge API, so every result is reproducible. Our AI layer - Claude Haiku, only explains: a verifier keeps its text only if it names the exact verdict, cites each source by date, and adds no number of its own.</a:t>
+              <a:t>Under the hood: two halves, one rulebook. First, the engine, at build time. Bun pipelines turn the Economic Index, ONET and DOSM into dated monthly snapshots. Each skill's AI trend resolves Malaysia-first, down six ONET levels, before any global figure. SkillsFuture Singapore adds skill names, never verdicts. Then a RunPod GPU batch, Qwen on vLLM, drafted skills for all 923 jobs in 13 minutes, and validators reject any task that isn't the job's own. Finally the product. One TypeScript rulebook runs in your browser and on our edge API, so every result is reproducible. Claude Haiku only explains: a verifier keeps its text only if it names the exact verdict, cites each source by date, and adds no number.</a:t>
             </a:r>
             <a:endParaRPr lang="en-US" dirty="0"/>
           </a:p>
